--- a/videoslides/flaecheninhalt-formen.pptx
+++ b/videoslides/flaecheninhalt-formen.pptx
@@ -1855,29 +1855,7 @@
       </p:sp>
       <p:sp>
         <p:nvSpPr>
-          <p:cNvPr id="4" name="Rechter Winkel 1"/>
-          <p:cNvSpPr/>
-          <p:nvPr/>
-        </p:nvSpPr>
-        <p:spPr>
-          <a:xfrm>
-            <a:off x="3048000" y="4953000"/>
-            <a:ext cx="381000" cy="381000"/>
-          </a:xfrm>
-          <a:prstGeom prst="rect">
-            <a:avLst/>
-          </a:prstGeom>
-          <a:ln w="44450">
-            <a:solidFill>
-              <a:srgbClr val="14459A"/>
-            </a:solidFill>
-            <a:prstDash val="solid"/>
-          </a:ln>
-        </p:spPr>
-      </p:sp>
-      <p:sp>
-        <p:nvSpPr>
-          <p:cNvPr id="5" name="Beschriftung 1"/>
+          <p:cNvPr id="4" name="Beschriftung 1"/>
           <p:cNvSpPr txBox="1"/>
           <p:nvPr/>
         </p:nvSpPr>
@@ -1916,7 +1894,7 @@
       </p:sp>
       <p:sp>
         <p:nvSpPr>
-          <p:cNvPr id="6" name="Beschriftung 2"/>
+          <p:cNvPr id="5" name="Beschriftung 2"/>
           <p:cNvSpPr txBox="1"/>
           <p:nvPr/>
         </p:nvSpPr>
@@ -2056,29 +2034,7 @@
       </p:sp>
       <p:sp>
         <p:nvSpPr>
-          <p:cNvPr id="5" name="Rechter Winkel 1"/>
-          <p:cNvSpPr/>
-          <p:nvPr/>
-        </p:nvSpPr>
-        <p:spPr>
-          <a:xfrm>
-            <a:off x="4191000" y="4572000"/>
-            <a:ext cx="381000" cy="381000"/>
-          </a:xfrm>
-          <a:prstGeom prst="rect">
-            <a:avLst/>
-          </a:prstGeom>
-          <a:ln w="44450">
-            <a:solidFill>
-              <a:srgbClr val="14459A"/>
-            </a:solidFill>
-            <a:prstDash val="solid"/>
-          </a:ln>
-        </p:spPr>
-      </p:sp>
-      <p:sp>
-        <p:nvSpPr>
-          <p:cNvPr id="6" name="Beschriftung 1"/>
+          <p:cNvPr id="5" name="Beschriftung 1"/>
           <p:cNvSpPr txBox="1"/>
           <p:nvPr/>
         </p:nvSpPr>
@@ -2117,7 +2073,7 @@
       </p:sp>
       <p:sp>
         <p:nvSpPr>
-          <p:cNvPr id="7" name="Beschriftung 2"/>
+          <p:cNvPr id="6" name="Beschriftung 2"/>
           <p:cNvSpPr txBox="1"/>
           <p:nvPr/>
         </p:nvSpPr>
@@ -2170,7 +2126,7 @@
       </p:sp>
       <p:sp>
         <p:nvSpPr>
-          <p:cNvPr id="8" name="Beschriftung 3"/>
+          <p:cNvPr id="7" name="Beschriftung 3"/>
           <p:cNvSpPr txBox="1"/>
           <p:nvPr/>
         </p:nvSpPr>
@@ -2333,29 +2289,7 @@
       </p:sp>
       <p:sp>
         <p:nvSpPr>
-          <p:cNvPr id="6" name="Rechter Winkel 1"/>
-          <p:cNvSpPr/>
-          <p:nvPr/>
-        </p:nvSpPr>
-        <p:spPr>
-          <a:xfrm>
-            <a:off x="6096000" y="3429000"/>
-            <a:ext cx="381000" cy="381000"/>
-          </a:xfrm>
-          <a:prstGeom prst="rect">
-            <a:avLst/>
-          </a:prstGeom>
-          <a:ln w="44450">
-            <a:solidFill>
-              <a:srgbClr val="14459A"/>
-            </a:solidFill>
-            <a:prstDash val="solid"/>
-          </a:ln>
-        </p:spPr>
-      </p:sp>
-      <p:sp>
-        <p:nvSpPr>
-          <p:cNvPr id="7" name="Beschriftung 1"/>
+          <p:cNvPr id="6" name="Beschriftung 1"/>
           <p:cNvSpPr txBox="1"/>
           <p:nvPr/>
         </p:nvSpPr>
@@ -2394,7 +2328,7 @@
       </p:sp>
       <p:sp>
         <p:nvSpPr>
-          <p:cNvPr id="8" name="Beschriftung 2"/>
+          <p:cNvPr id="7" name="Beschriftung 2"/>
           <p:cNvSpPr txBox="1"/>
           <p:nvPr/>
         </p:nvSpPr>
@@ -2433,7 +2367,7 @@
       </p:sp>
       <p:sp>
         <p:nvSpPr>
-          <p:cNvPr id="9" name="Beschriftung 3"/>
+          <p:cNvPr id="8" name="Beschriftung 3"/>
           <p:cNvSpPr txBox="1"/>
           <p:nvPr/>
         </p:nvSpPr>
@@ -2573,29 +2507,7 @@
       </p:sp>
       <p:sp>
         <p:nvSpPr>
-          <p:cNvPr id="5" name="Rechter Winkel 1"/>
-          <p:cNvSpPr/>
-          <p:nvPr/>
-        </p:nvSpPr>
-        <p:spPr>
-          <a:xfrm>
-            <a:off x="4191000" y="4953000"/>
-            <a:ext cx="381000" cy="381000"/>
-          </a:xfrm>
-          <a:prstGeom prst="rect">
-            <a:avLst/>
-          </a:prstGeom>
-          <a:ln w="44450">
-            <a:solidFill>
-              <a:srgbClr val="14459A"/>
-            </a:solidFill>
-            <a:prstDash val="solid"/>
-          </a:ln>
-        </p:spPr>
-      </p:sp>
-      <p:sp>
-        <p:nvSpPr>
-          <p:cNvPr id="6" name="Beschriftung 1"/>
+          <p:cNvPr id="5" name="Beschriftung 1"/>
           <p:cNvSpPr txBox="1"/>
           <p:nvPr/>
         </p:nvSpPr>
@@ -2634,7 +2546,7 @@
       </p:sp>
       <p:sp>
         <p:nvSpPr>
-          <p:cNvPr id="7" name="Beschriftung 2"/>
+          <p:cNvPr id="6" name="Beschriftung 2"/>
           <p:cNvSpPr txBox="1"/>
           <p:nvPr/>
         </p:nvSpPr>
@@ -2673,7 +2585,7 @@
       </p:sp>
       <p:sp>
         <p:nvSpPr>
-          <p:cNvPr id="8" name="Beschriftung 3"/>
+          <p:cNvPr id="7" name="Beschriftung 3"/>
           <p:cNvSpPr txBox="1"/>
           <p:nvPr/>
         </p:nvSpPr>
@@ -2836,29 +2748,7 @@
       </p:sp>
       <p:sp>
         <p:nvSpPr>
-          <p:cNvPr id="6" name="Rechter Winkel 1"/>
-          <p:cNvSpPr/>
-          <p:nvPr/>
-        </p:nvSpPr>
-        <p:spPr>
-          <a:xfrm>
-            <a:off x="6096000" y="2667000"/>
-            <a:ext cx="381000" cy="381000"/>
-          </a:xfrm>
-          <a:prstGeom prst="rect">
-            <a:avLst/>
-          </a:prstGeom>
-          <a:ln w="44450">
-            <a:solidFill>
-              <a:srgbClr val="14459A"/>
-            </a:solidFill>
-            <a:prstDash val="solid"/>
-          </a:ln>
-        </p:spPr>
-      </p:sp>
-      <p:sp>
-        <p:nvSpPr>
-          <p:cNvPr id="7" name="Beschriftung 1"/>
+          <p:cNvPr id="6" name="Beschriftung 1"/>
           <p:cNvSpPr txBox="1"/>
           <p:nvPr/>
         </p:nvSpPr>
@@ -2897,7 +2787,7 @@
       </p:sp>
       <p:sp>
         <p:nvSpPr>
-          <p:cNvPr id="8" name="Beschriftung 2"/>
+          <p:cNvPr id="7" name="Beschriftung 2"/>
           <p:cNvSpPr txBox="1"/>
           <p:nvPr/>
         </p:nvSpPr>
@@ -3034,29 +2924,7 @@
       </p:sp>
       <p:sp>
         <p:nvSpPr>
-          <p:cNvPr id="5" name="Rechter Winkel 1"/>
-          <p:cNvSpPr/>
-          <p:nvPr/>
-        </p:nvSpPr>
-        <p:spPr>
-          <a:xfrm>
-            <a:off x="6477000" y="4953000"/>
-            <a:ext cx="381000" cy="381000"/>
-          </a:xfrm>
-          <a:prstGeom prst="rect">
-            <a:avLst/>
-          </a:prstGeom>
-          <a:ln w="44450">
-            <a:solidFill>
-              <a:srgbClr val="14459A"/>
-            </a:solidFill>
-            <a:prstDash val="solid"/>
-          </a:ln>
-        </p:spPr>
-      </p:sp>
-      <p:sp>
-        <p:nvSpPr>
-          <p:cNvPr id="6" name="Beschriftung 1"/>
+          <p:cNvPr id="5" name="Beschriftung 1"/>
           <p:cNvSpPr txBox="1"/>
           <p:nvPr/>
         </p:nvSpPr>
@@ -3095,7 +2963,7 @@
       </p:sp>
       <p:sp>
         <p:nvSpPr>
-          <p:cNvPr id="7" name="Beschriftung 2"/>
+          <p:cNvPr id="6" name="Beschriftung 2"/>
           <p:cNvSpPr txBox="1"/>
           <p:nvPr/>
         </p:nvSpPr>

--- a/videoslides/flaecheninhalt-formen.pptx
+++ b/videoslides/flaecheninhalt-formen.pptx
@@ -13,9 +13,13 @@
     <p:sldId id="261" r:id="rId7"/>
     <p:sldId id="262" r:id="rId8"/>
     <p:sldId id="263" r:id="rId9"/>
+    <p:sldId id="264" r:id="rId10"/>
+    <p:sldId id="265" r:id="rId11"/>
+    <p:sldId id="266" r:id="rId12"/>
+    <p:sldId id="267" r:id="rId13"/>
   </p:sldIdLst>
   <p:notesMasterIdLst>
-    <p:notesMasterId r:id="rId10"/>
+    <p:notesMasterId r:id="rId14"/>
   </p:notesMasterIdLst>
   <p:sldSz cx="12192000" cy="6858000"/>
   <p:notesSz cx="6858000" cy="12192000"/>
@@ -509,7 +513,7 @@
           <a:p>
             <a:r>
               <a:rPr lang="en-US" dirty="0"/>
-              <a:t>Rechteck</a:t>
+              <a:t>Form 01: Rechteck</a:t>
             </a:r>
             <a:endParaRPr lang="en-US" dirty="0"/>
           </a:p>
@@ -533,6 +537,270 @@
             <a:fld id="{F7021451-1387-4CA6-816F-3879F97B5CBC}" type="slidenum">
               <a:rPr lang="en-US"/>
               <a:t>1</a:t>
+            </a:fld>
+            <a:endParaRPr lang="en-US"/>
+          </a:p>
+        </p:txBody>
+      </p:sp>
+    </p:spTree>
+    <p:extLst>
+      <p:ext uri="{BB962C8B-B14F-4D97-AF65-F5344CB8AC3E}">
+        <p14:creationId xmlns:p14="http://schemas.microsoft.com/office/powerpoint/2010/main" val="1024086991"/>
+      </p:ext>
+    </p:extLst>
+  </p:cSld>
+  <p:clrMapOvr>
+    <a:masterClrMapping/>
+  </p:clrMapOvr>
+</p:notes>
+</file>
+
+<file path=ppt/notesSlides/notesSlide10.xml><?xml version="1.0" encoding="utf-8"?>
+<p:notes xmlns:a="http://schemas.openxmlformats.org/drawingml/2006/main" xmlns:r="http://schemas.openxmlformats.org/officeDocument/2006/relationships" xmlns:p="http://schemas.openxmlformats.org/presentationml/2006/main">
+  <p:cSld>
+    <p:spTree>
+      <p:nvGrpSpPr>
+        <p:cNvPr id="1" name=""/>
+        <p:cNvGrpSpPr/>
+        <p:nvPr/>
+      </p:nvGrpSpPr>
+      <p:grpSpPr>
+        <a:xfrm>
+          <a:off x="0" y="0"/>
+          <a:ext cx="0" cy="0"/>
+          <a:chOff x="0" y="0"/>
+          <a:chExt cx="0" cy="0"/>
+        </a:xfrm>
+      </p:grpSpPr>
+      <p:sp>
+        <p:nvSpPr>
+          <p:cNvPr id="2" name="Slide Image Placeholder 1"/>
+          <p:cNvSpPr>
+            <a:spLocks noGrp="1" noRot="1" noChangeAspect="1"/>
+          </p:cNvSpPr>
+          <p:nvPr>
+            <p:ph type="sldImg"/>
+          </p:nvPr>
+        </p:nvSpPr>
+        <p:spPr/>
+      </p:sp>
+      <p:sp>
+        <p:nvSpPr>
+          <p:cNvPr id="3" name="Notes Placeholder 2"/>
+          <p:cNvSpPr>
+            <a:spLocks noGrp="1"/>
+          </p:cNvSpPr>
+          <p:nvPr>
+            <p:ph type="body" idx="1"/>
+          </p:nvPr>
+        </p:nvSpPr>
+        <p:spPr/>
+        <p:txBody>
+          <a:bodyPr/>
+          <a:lstStyle/>
+          <a:p>
+            <a:r>
+              <a:rPr lang="en-US" dirty="0"/>
+              <a:t>Form 10: Allgemeines Dreieck (Grundseite c)</a:t>
+            </a:r>
+            <a:endParaRPr lang="en-US" dirty="0"/>
+          </a:p>
+        </p:txBody>
+      </p:sp>
+      <p:sp>
+        <p:nvSpPr>
+          <p:cNvPr id="4" name="Slide Number Placeholder 3"/>
+          <p:cNvSpPr>
+            <a:spLocks noGrp="1"/>
+          </p:cNvSpPr>
+          <p:nvPr>
+            <p:ph type="sldNum" sz="quarter" idx="10"/>
+          </p:nvPr>
+        </p:nvSpPr>
+        <p:spPr/>
+        <p:txBody>
+          <a:bodyPr/>
+          <a:lstStyle/>
+          <a:p>
+            <a:fld id="{F7021451-1387-4CA6-816F-3879F97B5CBC}" type="slidenum">
+              <a:rPr lang="en-US"/>
+              <a:t>10</a:t>
+            </a:fld>
+            <a:endParaRPr lang="en-US"/>
+          </a:p>
+        </p:txBody>
+      </p:sp>
+    </p:spTree>
+    <p:extLst>
+      <p:ext uri="{BB962C8B-B14F-4D97-AF65-F5344CB8AC3E}">
+        <p14:creationId xmlns:p14="http://schemas.microsoft.com/office/powerpoint/2010/main" val="1024086991"/>
+      </p:ext>
+    </p:extLst>
+  </p:cSld>
+  <p:clrMapOvr>
+    <a:masterClrMapping/>
+  </p:clrMapOvr>
+</p:notes>
+</file>
+
+<file path=ppt/notesSlides/notesSlide11.xml><?xml version="1.0" encoding="utf-8"?>
+<p:notes xmlns:a="http://schemas.openxmlformats.org/drawingml/2006/main" xmlns:r="http://schemas.openxmlformats.org/officeDocument/2006/relationships" xmlns:p="http://schemas.openxmlformats.org/presentationml/2006/main">
+  <p:cSld>
+    <p:spTree>
+      <p:nvGrpSpPr>
+        <p:cNvPr id="1" name=""/>
+        <p:cNvGrpSpPr/>
+        <p:nvPr/>
+      </p:nvGrpSpPr>
+      <p:grpSpPr>
+        <a:xfrm>
+          <a:off x="0" y="0"/>
+          <a:ext cx="0" cy="0"/>
+          <a:chOff x="0" y="0"/>
+          <a:chExt cx="0" cy="0"/>
+        </a:xfrm>
+      </p:grpSpPr>
+      <p:sp>
+        <p:nvSpPr>
+          <p:cNvPr id="2" name="Slide Image Placeholder 1"/>
+          <p:cNvSpPr>
+            <a:spLocks noGrp="1" noRot="1" noChangeAspect="1"/>
+          </p:cNvSpPr>
+          <p:nvPr>
+            <p:ph type="sldImg"/>
+          </p:nvPr>
+        </p:nvSpPr>
+        <p:spPr/>
+      </p:sp>
+      <p:sp>
+        <p:nvSpPr>
+          <p:cNvPr id="3" name="Notes Placeholder 2"/>
+          <p:cNvSpPr>
+            <a:spLocks noGrp="1"/>
+          </p:cNvSpPr>
+          <p:nvPr>
+            <p:ph type="body" idx="1"/>
+          </p:nvPr>
+        </p:nvSpPr>
+        <p:spPr/>
+        <p:txBody>
+          <a:bodyPr/>
+          <a:lstStyle/>
+          <a:p>
+            <a:r>
+              <a:rPr lang="en-US" dirty="0"/>
+              <a:t>Form 11: Allgemeines Dreieck (Grundseite a)</a:t>
+            </a:r>
+            <a:endParaRPr lang="en-US" dirty="0"/>
+          </a:p>
+        </p:txBody>
+      </p:sp>
+      <p:sp>
+        <p:nvSpPr>
+          <p:cNvPr id="4" name="Slide Number Placeholder 3"/>
+          <p:cNvSpPr>
+            <a:spLocks noGrp="1"/>
+          </p:cNvSpPr>
+          <p:nvPr>
+            <p:ph type="sldNum" sz="quarter" idx="10"/>
+          </p:nvPr>
+        </p:nvSpPr>
+        <p:spPr/>
+        <p:txBody>
+          <a:bodyPr/>
+          <a:lstStyle/>
+          <a:p>
+            <a:fld id="{F7021451-1387-4CA6-816F-3879F97B5CBC}" type="slidenum">
+              <a:rPr lang="en-US"/>
+              <a:t>11</a:t>
+            </a:fld>
+            <a:endParaRPr lang="en-US"/>
+          </a:p>
+        </p:txBody>
+      </p:sp>
+    </p:spTree>
+    <p:extLst>
+      <p:ext uri="{BB962C8B-B14F-4D97-AF65-F5344CB8AC3E}">
+        <p14:creationId xmlns:p14="http://schemas.microsoft.com/office/powerpoint/2010/main" val="1024086991"/>
+      </p:ext>
+    </p:extLst>
+  </p:cSld>
+  <p:clrMapOvr>
+    <a:masterClrMapping/>
+  </p:clrMapOvr>
+</p:notes>
+</file>
+
+<file path=ppt/notesSlides/notesSlide12.xml><?xml version="1.0" encoding="utf-8"?>
+<p:notes xmlns:a="http://schemas.openxmlformats.org/drawingml/2006/main" xmlns:r="http://schemas.openxmlformats.org/officeDocument/2006/relationships" xmlns:p="http://schemas.openxmlformats.org/presentationml/2006/main">
+  <p:cSld>
+    <p:spTree>
+      <p:nvGrpSpPr>
+        <p:cNvPr id="1" name=""/>
+        <p:cNvGrpSpPr/>
+        <p:nvPr/>
+      </p:nvGrpSpPr>
+      <p:grpSpPr>
+        <a:xfrm>
+          <a:off x="0" y="0"/>
+          <a:ext cx="0" cy="0"/>
+          <a:chOff x="0" y="0"/>
+          <a:chExt cx="0" cy="0"/>
+        </a:xfrm>
+      </p:grpSpPr>
+      <p:sp>
+        <p:nvSpPr>
+          <p:cNvPr id="2" name="Slide Image Placeholder 1"/>
+          <p:cNvSpPr>
+            <a:spLocks noGrp="1" noRot="1" noChangeAspect="1"/>
+          </p:cNvSpPr>
+          <p:nvPr>
+            <p:ph type="sldImg"/>
+          </p:nvPr>
+        </p:nvSpPr>
+        <p:spPr/>
+      </p:sp>
+      <p:sp>
+        <p:nvSpPr>
+          <p:cNvPr id="3" name="Notes Placeholder 2"/>
+          <p:cNvSpPr>
+            <a:spLocks noGrp="1"/>
+          </p:cNvSpPr>
+          <p:nvPr>
+            <p:ph type="body" idx="1"/>
+          </p:nvPr>
+        </p:nvSpPr>
+        <p:spPr/>
+        <p:txBody>
+          <a:bodyPr/>
+          <a:lstStyle/>
+          <a:p>
+            <a:r>
+              <a:rPr lang="en-US" dirty="0"/>
+              <a:t>Form 12: Allgemeines Dreieck (Grundseite b)</a:t>
+            </a:r>
+            <a:endParaRPr lang="en-US" dirty="0"/>
+          </a:p>
+        </p:txBody>
+      </p:sp>
+      <p:sp>
+        <p:nvSpPr>
+          <p:cNvPr id="4" name="Slide Number Placeholder 3"/>
+          <p:cNvSpPr>
+            <a:spLocks noGrp="1"/>
+          </p:cNvSpPr>
+          <p:nvPr>
+            <p:ph type="sldNum" sz="quarter" idx="10"/>
+          </p:nvPr>
+        </p:nvSpPr>
+        <p:spPr/>
+        <p:txBody>
+          <a:bodyPr/>
+          <a:lstStyle/>
+          <a:p>
+            <a:fld id="{F7021451-1387-4CA6-816F-3879F97B5CBC}" type="slidenum">
+              <a:rPr lang="en-US"/>
+              <a:t>12</a:t>
             </a:fld>
             <a:endParaRPr lang="en-US"/>
           </a:p>
@@ -597,7 +865,7 @@
           <a:p>
             <a:r>
               <a:rPr lang="en-US" dirty="0"/>
-              <a:t>Quadrat</a:t>
+              <a:t>Form 02: Quadrat</a:t>
             </a:r>
             <a:endParaRPr lang="en-US" dirty="0"/>
           </a:p>
@@ -685,7 +953,7 @@
           <a:p>
             <a:r>
               <a:rPr lang="en-US" dirty="0"/>
-              <a:t>Rechtwinkliges Dreieck</a:t>
+              <a:t>Form 03: Rechtwinkliges Dreieck</a:t>
             </a:r>
             <a:endParaRPr lang="en-US" dirty="0"/>
           </a:p>
@@ -773,7 +1041,7 @@
           <a:p>
             <a:r>
               <a:rPr lang="en-US" dirty="0"/>
-              <a:t>Parallelogramm</a:t>
+              <a:t>Form 04: Parallelogramm (Grundseite a)</a:t>
             </a:r>
             <a:endParaRPr lang="en-US" dirty="0"/>
           </a:p>
@@ -861,7 +1129,7 @@
           <a:p>
             <a:r>
               <a:rPr lang="en-US" dirty="0"/>
-              <a:t>Raute</a:t>
+              <a:t>Form 05: Parallelogramm (Grundseite b)</a:t>
             </a:r>
             <a:endParaRPr lang="en-US" dirty="0"/>
           </a:p>
@@ -949,7 +1217,7 @@
           <a:p>
             <a:r>
               <a:rPr lang="en-US" dirty="0"/>
-              <a:t>Trapez</a:t>
+              <a:t>Form 06: Raute (Seite a, Höhe h)</a:t>
             </a:r>
             <a:endParaRPr lang="en-US" dirty="0"/>
           </a:p>
@@ -1037,7 +1305,7 @@
           <a:p>
             <a:r>
               <a:rPr lang="en-US" dirty="0"/>
-              <a:t>Deltoid</a:t>
+              <a:t>Form 07: Raute (Diagonalen e, f)</a:t>
             </a:r>
             <a:endParaRPr lang="en-US" dirty="0"/>
           </a:p>
@@ -1125,7 +1393,7 @@
           <a:p>
             <a:r>
               <a:rPr lang="en-US" dirty="0"/>
-              <a:t>Allgemeines Dreieck</a:t>
+              <a:t>Form 08: Trapez</a:t>
             </a:r>
             <a:endParaRPr lang="en-US" dirty="0"/>
           </a:p>
@@ -1149,6 +1417,94 @@
             <a:fld id="{F7021451-1387-4CA6-816F-3879F97B5CBC}" type="slidenum">
               <a:rPr lang="en-US"/>
               <a:t>8</a:t>
+            </a:fld>
+            <a:endParaRPr lang="en-US"/>
+          </a:p>
+        </p:txBody>
+      </p:sp>
+    </p:spTree>
+    <p:extLst>
+      <p:ext uri="{BB962C8B-B14F-4D97-AF65-F5344CB8AC3E}">
+        <p14:creationId xmlns:p14="http://schemas.microsoft.com/office/powerpoint/2010/main" val="1024086991"/>
+      </p:ext>
+    </p:extLst>
+  </p:cSld>
+  <p:clrMapOvr>
+    <a:masterClrMapping/>
+  </p:clrMapOvr>
+</p:notes>
+</file>
+
+<file path=ppt/notesSlides/notesSlide9.xml><?xml version="1.0" encoding="utf-8"?>
+<p:notes xmlns:a="http://schemas.openxmlformats.org/drawingml/2006/main" xmlns:r="http://schemas.openxmlformats.org/officeDocument/2006/relationships" xmlns:p="http://schemas.openxmlformats.org/presentationml/2006/main">
+  <p:cSld>
+    <p:spTree>
+      <p:nvGrpSpPr>
+        <p:cNvPr id="1" name=""/>
+        <p:cNvGrpSpPr/>
+        <p:nvPr/>
+      </p:nvGrpSpPr>
+      <p:grpSpPr>
+        <a:xfrm>
+          <a:off x="0" y="0"/>
+          <a:ext cx="0" cy="0"/>
+          <a:chOff x="0" y="0"/>
+          <a:chExt cx="0" cy="0"/>
+        </a:xfrm>
+      </p:grpSpPr>
+      <p:sp>
+        <p:nvSpPr>
+          <p:cNvPr id="2" name="Slide Image Placeholder 1"/>
+          <p:cNvSpPr>
+            <a:spLocks noGrp="1" noRot="1" noChangeAspect="1"/>
+          </p:cNvSpPr>
+          <p:nvPr>
+            <p:ph type="sldImg"/>
+          </p:nvPr>
+        </p:nvSpPr>
+        <p:spPr/>
+      </p:sp>
+      <p:sp>
+        <p:nvSpPr>
+          <p:cNvPr id="3" name="Notes Placeholder 2"/>
+          <p:cNvSpPr>
+            <a:spLocks noGrp="1"/>
+          </p:cNvSpPr>
+          <p:nvPr>
+            <p:ph type="body" idx="1"/>
+          </p:nvPr>
+        </p:nvSpPr>
+        <p:spPr/>
+        <p:txBody>
+          <a:bodyPr/>
+          <a:lstStyle/>
+          <a:p>
+            <a:r>
+              <a:rPr lang="en-US" dirty="0"/>
+              <a:t>Form 09: Deltoid</a:t>
+            </a:r>
+            <a:endParaRPr lang="en-US" dirty="0"/>
+          </a:p>
+        </p:txBody>
+      </p:sp>
+      <p:sp>
+        <p:nvSpPr>
+          <p:cNvPr id="4" name="Slide Number Placeholder 3"/>
+          <p:cNvSpPr>
+            <a:spLocks noGrp="1"/>
+          </p:cNvSpPr>
+          <p:nvPr>
+            <p:ph type="sldNum" sz="quarter" idx="10"/>
+          </p:nvPr>
+        </p:nvSpPr>
+        <p:spPr/>
+        <p:txBody>
+          <a:bodyPr/>
+          <a:lstStyle/>
+          <a:p>
+            <a:fld id="{F7021451-1387-4CA6-816F-3879F97B5CBC}" type="slidenum">
+              <a:rPr lang="en-US"/>
+              <a:t>9</a:t>
             </a:fld>
             <a:endParaRPr lang="en-US"/>
           </a:p>
@@ -1500,7 +1856,7 @@
       </p:grpSpPr>
       <p:sp>
         <p:nvSpPr>
-          <p:cNvPr id="3" name="Rechteck"/>
+          <p:cNvPr id="3" name="Form 01 Rechteck"/>
           <p:cNvSpPr/>
           <p:nvPr/>
         </p:nvSpPr>
@@ -1609,6 +1965,576 @@
             </a:pPr>
             <a:r>
               <a:rPr lang="en-US" sz="3900" b="1" dirty="0">
+                <a:solidFill>
+                  <a:srgbClr val="14459A"/>
+                </a:solidFill>
+                <a:latin typeface="Poppins" pitchFamily="34" charset="0"/>
+                <a:ea typeface="Poppins" pitchFamily="34" charset="-122"/>
+                <a:cs typeface="Poppins" pitchFamily="34" charset="-120"/>
+              </a:rPr>
+              <a:t>b</a:t>
+            </a:r>
+            <a:endParaRPr lang="en-US" sz="3900" dirty="0"/>
+          </a:p>
+        </p:txBody>
+      </p:sp>
+    </p:spTree>
+  </p:cSld>
+  <p:clrMapOvr>
+    <a:masterClrMapping/>
+  </p:clrMapOvr>
+</p:sld>
+</file>
+
+<file path=ppt/slides/slide10.xml><?xml version="1.0" encoding="utf-8"?>
+<p:sld xmlns:a="http://schemas.openxmlformats.org/drawingml/2006/main" xmlns:r="http://schemas.openxmlformats.org/officeDocument/2006/relationships" xmlns:p="http://schemas.openxmlformats.org/presentationml/2006/main">
+  <p:cSld name="Slide 10">
+    <p:bg>
+      <p:bgPr>
+        <a:solidFill>
+          <a:srgbClr val="DCEBFA"/>
+        </a:solidFill>
+      </p:bgPr>
+    </p:bg>
+    <p:spTree>
+      <p:nvGrpSpPr>
+        <p:cNvPr id="1" name=""/>
+        <p:cNvGrpSpPr/>
+        <p:nvPr/>
+      </p:nvGrpSpPr>
+      <p:grpSpPr>
+        <a:xfrm>
+          <a:off x="0" y="0"/>
+          <a:ext cx="0" cy="0"/>
+          <a:chOff x="0" y="0"/>
+          <a:chExt cx="0" cy="0"/>
+        </a:xfrm>
+      </p:grpSpPr>
+      <p:sp>
+        <p:nvSpPr>
+          <p:cNvPr id="3" name="Form 10 Allgemeines Dreieck (Grundseite c)"/>
+          <p:cNvSpPr/>
+          <p:nvPr/>
+        </p:nvSpPr>
+        <p:spPr>
+          <a:xfrm>
+            <a:off x="2667000" y="1752600"/>
+            <a:ext cx="6858000" cy="3581400"/>
+          </a:xfrm>
+          <a:custGeom>
+            <a:avLst/>
+            <a:gdLst/>
+            <a:ahLst/>
+            <a:cxnLst/>
+            <a:rect l="l" t="t" r="r" b="b"/>
+            <a:pathLst>
+              <a:path w="6858000" h="3581400">
+                <a:moveTo>
+                  <a:pt x="0" y="3581400"/>
+                </a:moveTo>
+                <a:lnTo>
+                  <a:pt x="6858000" y="3581400"/>
+                </a:lnTo>
+                <a:lnTo>
+                  <a:pt x="3810000" y="0"/>
+                </a:lnTo>
+                <a:close/>
+              </a:path>
+            </a:pathLst>
+          </a:custGeom>
+          <a:solidFill>
+            <a:srgbClr val="8DBBF2"/>
+          </a:solidFill>
+          <a:ln w="76200">
+            <a:solidFill>
+              <a:srgbClr val="0F2A52"/>
+            </a:solidFill>
+            <a:prstDash val="solid"/>
+          </a:ln>
+        </p:spPr>
+      </p:sp>
+      <p:sp>
+        <p:nvSpPr>
+          <p:cNvPr id="4" name="Hilfslinie 1"/>
+          <p:cNvSpPr/>
+          <p:nvPr/>
+        </p:nvSpPr>
+        <p:spPr>
+          <a:xfrm>
+            <a:off x="6477000" y="1752600"/>
+            <a:ext cx="0" cy="3581400"/>
+          </a:xfrm>
+          <a:prstGeom prst="line">
+            <a:avLst/>
+          </a:prstGeom>
+          <a:noFill/>
+          <a:ln w="50800">
+            <a:solidFill>
+              <a:srgbClr val="14459A"/>
+            </a:solidFill>
+            <a:prstDash val="dash"/>
+          </a:ln>
+        </p:spPr>
+      </p:sp>
+      <p:sp>
+        <p:nvSpPr>
+          <p:cNvPr id="5" name="Beschriftung 1"/>
+          <p:cNvSpPr txBox="1"/>
+          <p:nvPr/>
+        </p:nvSpPr>
+        <p:spPr>
+          <a:xfrm>
+            <a:off x="5638800" y="5600700"/>
+            <a:ext cx="914400" cy="685800"/>
+          </a:xfrm>
+          <a:prstGeom prst="rect">
+            <a:avLst/>
+          </a:prstGeom>
+          <a:noFill/>
+          <a:ln/>
+        </p:spPr>
+        <p:txBody>
+          <a:bodyPr wrap="square" lIns="0" tIns="0" rIns="0" bIns="0" rtlCol="0" anchor="ctr"/>
+          <a:lstStyle/>
+          <a:p>
+            <a:pPr algn="ctr" indent="0" marL="0">
+              <a:buNone/>
+            </a:pPr>
+            <a:r>
+              <a:rPr lang="en-US" sz="3900" b="1" dirty="0">
+                <a:solidFill>
+                  <a:srgbClr val="14459A"/>
+                </a:solidFill>
+                <a:latin typeface="Poppins" pitchFamily="34" charset="0"/>
+                <a:ea typeface="Poppins" pitchFamily="34" charset="-122"/>
+                <a:cs typeface="Poppins" pitchFamily="34" charset="-120"/>
+              </a:rPr>
+              <a:t>c</a:t>
+            </a:r>
+            <a:endParaRPr lang="en-US" sz="3900" dirty="0"/>
+          </a:p>
+        </p:txBody>
+      </p:sp>
+      <p:sp>
+        <p:nvSpPr>
+          <p:cNvPr id="6" name="Beschriftung 2"/>
+          <p:cNvSpPr txBox="1"/>
+          <p:nvPr/>
+        </p:nvSpPr>
+        <p:spPr>
+          <a:xfrm>
+            <a:off x="5676900" y="3314700"/>
+            <a:ext cx="914400" cy="685800"/>
+          </a:xfrm>
+          <a:prstGeom prst="rect">
+            <a:avLst/>
+          </a:prstGeom>
+          <a:noFill/>
+          <a:ln/>
+        </p:spPr>
+        <p:txBody>
+          <a:bodyPr wrap="square" lIns="0" tIns="0" rIns="0" bIns="0" rtlCol="0" anchor="ctr"/>
+          <a:lstStyle/>
+          <a:p>
+            <a:pPr algn="ctr" indent="0" marL="0">
+              <a:buNone/>
+            </a:pPr>
+            <a:r>
+              <a:rPr lang="en-US" sz="3900" b="1" dirty="0">
+                <a:solidFill>
+                  <a:srgbClr val="14459A"/>
+                </a:solidFill>
+                <a:latin typeface="Poppins" pitchFamily="34" charset="0"/>
+                <a:ea typeface="Poppins" pitchFamily="34" charset="-122"/>
+                <a:cs typeface="Poppins" pitchFamily="34" charset="-120"/>
+              </a:rPr>
+              <a:t>h</a:t>
+            </a:r>
+            <a:pPr algn="ctr" indent="0" marL="0">
+              <a:buNone/>
+            </a:pPr>
+            <a:r>
+              <a:rPr lang="en-US" sz="3900" b="1" baseline="-40000" dirty="0">
+                <a:solidFill>
+                  <a:srgbClr val="14459A"/>
+                </a:solidFill>
+                <a:latin typeface="Poppins" pitchFamily="34" charset="0"/>
+                <a:ea typeface="Poppins" pitchFamily="34" charset="-122"/>
+                <a:cs typeface="Poppins" pitchFamily="34" charset="-120"/>
+              </a:rPr>
+              <a:t>c</a:t>
+            </a:r>
+            <a:endParaRPr lang="en-US" sz="3900" dirty="0"/>
+          </a:p>
+        </p:txBody>
+      </p:sp>
+    </p:spTree>
+  </p:cSld>
+  <p:clrMapOvr>
+    <a:masterClrMapping/>
+  </p:clrMapOvr>
+</p:sld>
+</file>
+
+<file path=ppt/slides/slide11.xml><?xml version="1.0" encoding="utf-8"?>
+<p:sld xmlns:a="http://schemas.openxmlformats.org/drawingml/2006/main" xmlns:r="http://schemas.openxmlformats.org/officeDocument/2006/relationships" xmlns:p="http://schemas.openxmlformats.org/presentationml/2006/main">
+  <p:cSld name="Slide 11">
+    <p:bg>
+      <p:bgPr>
+        <a:solidFill>
+          <a:srgbClr val="DCEBFA"/>
+        </a:solidFill>
+      </p:bgPr>
+    </p:bg>
+    <p:spTree>
+      <p:nvGrpSpPr>
+        <p:cNvPr id="1" name=""/>
+        <p:cNvGrpSpPr/>
+        <p:nvPr/>
+      </p:nvGrpSpPr>
+      <p:grpSpPr>
+        <a:xfrm>
+          <a:off x="0" y="0"/>
+          <a:ext cx="0" cy="0"/>
+          <a:chOff x="0" y="0"/>
+          <a:chExt cx="0" cy="0"/>
+        </a:xfrm>
+      </p:grpSpPr>
+      <p:sp>
+        <p:nvSpPr>
+          <p:cNvPr id="3" name="Form 11 Allgemeines Dreieck (Grundseite a)"/>
+          <p:cNvSpPr/>
+          <p:nvPr/>
+        </p:nvSpPr>
+        <p:spPr>
+          <a:xfrm>
+            <a:off x="2667000" y="1752600"/>
+            <a:ext cx="6858000" cy="3581400"/>
+          </a:xfrm>
+          <a:custGeom>
+            <a:avLst/>
+            <a:gdLst/>
+            <a:ahLst/>
+            <a:cxnLst/>
+            <a:rect l="l" t="t" r="r" b="b"/>
+            <a:pathLst>
+              <a:path w="6858000" h="3581400">
+                <a:moveTo>
+                  <a:pt x="0" y="3581400"/>
+                </a:moveTo>
+                <a:lnTo>
+                  <a:pt x="6858000" y="3581400"/>
+                </a:lnTo>
+                <a:lnTo>
+                  <a:pt x="4953000" y="0"/>
+                </a:lnTo>
+                <a:close/>
+              </a:path>
+            </a:pathLst>
+          </a:custGeom>
+          <a:solidFill>
+            <a:srgbClr val="8DBBF2"/>
+          </a:solidFill>
+          <a:ln w="76200">
+            <a:solidFill>
+              <a:srgbClr val="0F2A52"/>
+            </a:solidFill>
+            <a:prstDash val="solid"/>
+          </a:ln>
+        </p:spPr>
+      </p:sp>
+      <p:sp>
+        <p:nvSpPr>
+          <p:cNvPr id="4" name="Hilfslinie 1"/>
+          <p:cNvSpPr/>
+          <p:nvPr/>
+        </p:nvSpPr>
+        <p:spPr>
+          <a:xfrm>
+            <a:off x="7620000" y="1752600"/>
+            <a:ext cx="0" cy="3581400"/>
+          </a:xfrm>
+          <a:prstGeom prst="line">
+            <a:avLst/>
+          </a:prstGeom>
+          <a:noFill/>
+          <a:ln w="50800">
+            <a:solidFill>
+              <a:srgbClr val="14459A"/>
+            </a:solidFill>
+            <a:prstDash val="dash"/>
+          </a:ln>
+        </p:spPr>
+      </p:sp>
+      <p:sp>
+        <p:nvSpPr>
+          <p:cNvPr id="5" name="Beschriftung 1"/>
+          <p:cNvSpPr txBox="1"/>
+          <p:nvPr/>
+        </p:nvSpPr>
+        <p:spPr>
+          <a:xfrm>
+            <a:off x="5638800" y="5600700"/>
+            <a:ext cx="914400" cy="685800"/>
+          </a:xfrm>
+          <a:prstGeom prst="rect">
+            <a:avLst/>
+          </a:prstGeom>
+          <a:noFill/>
+          <a:ln/>
+        </p:spPr>
+        <p:txBody>
+          <a:bodyPr wrap="square" lIns="0" tIns="0" rIns="0" bIns="0" rtlCol="0" anchor="ctr"/>
+          <a:lstStyle/>
+          <a:p>
+            <a:pPr algn="ctr" indent="0" marL="0">
+              <a:buNone/>
+            </a:pPr>
+            <a:r>
+              <a:rPr lang="en-US" sz="3900" b="1" dirty="0">
+                <a:solidFill>
+                  <a:srgbClr val="14459A"/>
+                </a:solidFill>
+                <a:latin typeface="Poppins" pitchFamily="34" charset="0"/>
+                <a:ea typeface="Poppins" pitchFamily="34" charset="-122"/>
+                <a:cs typeface="Poppins" pitchFamily="34" charset="-120"/>
+              </a:rPr>
+              <a:t>a</a:t>
+            </a:r>
+            <a:endParaRPr lang="en-US" sz="3900" dirty="0"/>
+          </a:p>
+        </p:txBody>
+      </p:sp>
+      <p:sp>
+        <p:nvSpPr>
+          <p:cNvPr id="6" name="Beschriftung 2"/>
+          <p:cNvSpPr txBox="1"/>
+          <p:nvPr/>
+        </p:nvSpPr>
+        <p:spPr>
+          <a:xfrm>
+            <a:off x="6819900" y="3314700"/>
+            <a:ext cx="914400" cy="685800"/>
+          </a:xfrm>
+          <a:prstGeom prst="rect">
+            <a:avLst/>
+          </a:prstGeom>
+          <a:noFill/>
+          <a:ln/>
+        </p:spPr>
+        <p:txBody>
+          <a:bodyPr wrap="square" lIns="0" tIns="0" rIns="0" bIns="0" rtlCol="0" anchor="ctr"/>
+          <a:lstStyle/>
+          <a:p>
+            <a:pPr algn="ctr" indent="0" marL="0">
+              <a:buNone/>
+            </a:pPr>
+            <a:r>
+              <a:rPr lang="en-US" sz="3900" b="1" dirty="0">
+                <a:solidFill>
+                  <a:srgbClr val="14459A"/>
+                </a:solidFill>
+                <a:latin typeface="Poppins" pitchFamily="34" charset="0"/>
+                <a:ea typeface="Poppins" pitchFamily="34" charset="-122"/>
+                <a:cs typeface="Poppins" pitchFamily="34" charset="-120"/>
+              </a:rPr>
+              <a:t>h</a:t>
+            </a:r>
+            <a:pPr algn="ctr" indent="0" marL="0">
+              <a:buNone/>
+            </a:pPr>
+            <a:r>
+              <a:rPr lang="en-US" sz="3900" b="1" baseline="-40000" dirty="0">
+                <a:solidFill>
+                  <a:srgbClr val="14459A"/>
+                </a:solidFill>
+                <a:latin typeface="Poppins" pitchFamily="34" charset="0"/>
+                <a:ea typeface="Poppins" pitchFamily="34" charset="-122"/>
+                <a:cs typeface="Poppins" pitchFamily="34" charset="-120"/>
+              </a:rPr>
+              <a:t>a</a:t>
+            </a:r>
+            <a:endParaRPr lang="en-US" sz="3900" dirty="0"/>
+          </a:p>
+        </p:txBody>
+      </p:sp>
+    </p:spTree>
+  </p:cSld>
+  <p:clrMapOvr>
+    <a:masterClrMapping/>
+  </p:clrMapOvr>
+</p:sld>
+</file>
+
+<file path=ppt/slides/slide12.xml><?xml version="1.0" encoding="utf-8"?>
+<p:sld xmlns:a="http://schemas.openxmlformats.org/drawingml/2006/main" xmlns:r="http://schemas.openxmlformats.org/officeDocument/2006/relationships" xmlns:p="http://schemas.openxmlformats.org/presentationml/2006/main">
+  <p:cSld name="Slide 12">
+    <p:bg>
+      <p:bgPr>
+        <a:solidFill>
+          <a:srgbClr val="DCEBFA"/>
+        </a:solidFill>
+      </p:bgPr>
+    </p:bg>
+    <p:spTree>
+      <p:nvGrpSpPr>
+        <p:cNvPr id="1" name=""/>
+        <p:cNvGrpSpPr/>
+        <p:nvPr/>
+      </p:nvGrpSpPr>
+      <p:grpSpPr>
+        <a:xfrm>
+          <a:off x="0" y="0"/>
+          <a:ext cx="0" cy="0"/>
+          <a:chOff x="0" y="0"/>
+          <a:chExt cx="0" cy="0"/>
+        </a:xfrm>
+      </p:grpSpPr>
+      <p:sp>
+        <p:nvSpPr>
+          <p:cNvPr id="3" name="Form 12 Allgemeines Dreieck (Grundseite b)"/>
+          <p:cNvSpPr/>
+          <p:nvPr/>
+        </p:nvSpPr>
+        <p:spPr>
+          <a:xfrm>
+            <a:off x="2667000" y="1752600"/>
+            <a:ext cx="6858000" cy="3581400"/>
+          </a:xfrm>
+          <a:custGeom>
+            <a:avLst/>
+            <a:gdLst/>
+            <a:ahLst/>
+            <a:cxnLst/>
+            <a:rect l="l" t="t" r="r" b="b"/>
+            <a:pathLst>
+              <a:path w="6858000" h="3581400">
+                <a:moveTo>
+                  <a:pt x="0" y="3581400"/>
+                </a:moveTo>
+                <a:lnTo>
+                  <a:pt x="6858000" y="3581400"/>
+                </a:lnTo>
+                <a:lnTo>
+                  <a:pt x="1905000" y="0"/>
+                </a:lnTo>
+                <a:close/>
+              </a:path>
+            </a:pathLst>
+          </a:custGeom>
+          <a:solidFill>
+            <a:srgbClr val="8DBBF2"/>
+          </a:solidFill>
+          <a:ln w="76200">
+            <a:solidFill>
+              <a:srgbClr val="0F2A52"/>
+            </a:solidFill>
+            <a:prstDash val="solid"/>
+          </a:ln>
+        </p:spPr>
+      </p:sp>
+      <p:sp>
+        <p:nvSpPr>
+          <p:cNvPr id="4" name="Hilfslinie 1"/>
+          <p:cNvSpPr/>
+          <p:nvPr/>
+        </p:nvSpPr>
+        <p:spPr>
+          <a:xfrm>
+            <a:off x="4572000" y="1752600"/>
+            <a:ext cx="0" cy="3581400"/>
+          </a:xfrm>
+          <a:prstGeom prst="line">
+            <a:avLst/>
+          </a:prstGeom>
+          <a:noFill/>
+          <a:ln w="50800">
+            <a:solidFill>
+              <a:srgbClr val="14459A"/>
+            </a:solidFill>
+            <a:prstDash val="dash"/>
+          </a:ln>
+        </p:spPr>
+      </p:sp>
+      <p:sp>
+        <p:nvSpPr>
+          <p:cNvPr id="5" name="Beschriftung 1"/>
+          <p:cNvSpPr txBox="1"/>
+          <p:nvPr/>
+        </p:nvSpPr>
+        <p:spPr>
+          <a:xfrm>
+            <a:off x="5638800" y="5600700"/>
+            <a:ext cx="914400" cy="685800"/>
+          </a:xfrm>
+          <a:prstGeom prst="rect">
+            <a:avLst/>
+          </a:prstGeom>
+          <a:noFill/>
+          <a:ln/>
+        </p:spPr>
+        <p:txBody>
+          <a:bodyPr wrap="square" lIns="0" tIns="0" rIns="0" bIns="0" rtlCol="0" anchor="ctr"/>
+          <a:lstStyle/>
+          <a:p>
+            <a:pPr algn="ctr" indent="0" marL="0">
+              <a:buNone/>
+            </a:pPr>
+            <a:r>
+              <a:rPr lang="en-US" sz="3900" b="1" dirty="0">
+                <a:solidFill>
+                  <a:srgbClr val="14459A"/>
+                </a:solidFill>
+                <a:latin typeface="Poppins" pitchFamily="34" charset="0"/>
+                <a:ea typeface="Poppins" pitchFamily="34" charset="-122"/>
+                <a:cs typeface="Poppins" pitchFamily="34" charset="-120"/>
+              </a:rPr>
+              <a:t>b</a:t>
+            </a:r>
+            <a:endParaRPr lang="en-US" sz="3900" dirty="0"/>
+          </a:p>
+        </p:txBody>
+      </p:sp>
+      <p:sp>
+        <p:nvSpPr>
+          <p:cNvPr id="6" name="Beschriftung 2"/>
+          <p:cNvSpPr txBox="1"/>
+          <p:nvPr/>
+        </p:nvSpPr>
+        <p:spPr>
+          <a:xfrm>
+            <a:off x="3771900" y="3314700"/>
+            <a:ext cx="914400" cy="685800"/>
+          </a:xfrm>
+          <a:prstGeom prst="rect">
+            <a:avLst/>
+          </a:prstGeom>
+          <a:noFill/>
+          <a:ln/>
+        </p:spPr>
+        <p:txBody>
+          <a:bodyPr wrap="square" lIns="0" tIns="0" rIns="0" bIns="0" rtlCol="0" anchor="ctr"/>
+          <a:lstStyle/>
+          <a:p>
+            <a:pPr algn="ctr" indent="0" marL="0">
+              <a:buNone/>
+            </a:pPr>
+            <a:r>
+              <a:rPr lang="en-US" sz="3900" b="1" dirty="0">
+                <a:solidFill>
+                  <a:srgbClr val="14459A"/>
+                </a:solidFill>
+                <a:latin typeface="Poppins" pitchFamily="34" charset="0"/>
+                <a:ea typeface="Poppins" pitchFamily="34" charset="-122"/>
+                <a:cs typeface="Poppins" pitchFamily="34" charset="-120"/>
+              </a:rPr>
+              <a:t>h</a:t>
+            </a:r>
+            <a:pPr algn="ctr" indent="0" marL="0">
+              <a:buNone/>
+            </a:pPr>
+            <a:r>
+              <a:rPr lang="en-US" sz="3900" b="1" baseline="-40000" dirty="0">
                 <a:solidFill>
                   <a:srgbClr val="14459A"/>
                 </a:solidFill>
@@ -1656,7 +2582,7 @@
       </p:grpSpPr>
       <p:sp>
         <p:nvSpPr>
-          <p:cNvPr id="3" name="Quadrat"/>
+          <p:cNvPr id="3" name="Form 02 Quadrat"/>
           <p:cNvSpPr/>
           <p:nvPr/>
         </p:nvSpPr>
@@ -1812,7 +2738,7 @@
       </p:grpSpPr>
       <p:sp>
         <p:nvSpPr>
-          <p:cNvPr id="3" name="Rechtwinkliges Dreieck"/>
+          <p:cNvPr id="3" name="Form 03 Rechtwinkliges Dreieck"/>
           <p:cNvSpPr/>
           <p:nvPr/>
         </p:nvSpPr>
@@ -1965,7 +2891,7 @@
       </p:grpSpPr>
       <p:sp>
         <p:nvSpPr>
-          <p:cNvPr id="3" name="Parallelogramm"/>
+          <p:cNvPr id="3" name="Form 04 Parallelogramm (Grundseite a)"/>
           <p:cNvSpPr/>
           <p:nvPr/>
         </p:nvSpPr>
@@ -2119,45 +3045,6 @@
                 <a:cs typeface="Poppins" pitchFamily="34" charset="-120"/>
               </a:rPr>
               <a:t>a</a:t>
-            </a:r>
-            <a:endParaRPr lang="en-US" sz="3900" dirty="0"/>
-          </a:p>
-        </p:txBody>
-      </p:sp>
-      <p:sp>
-        <p:nvSpPr>
-          <p:cNvPr id="7" name="Beschriftung 3"/>
-          <p:cNvSpPr txBox="1"/>
-          <p:nvPr/>
-        </p:nvSpPr>
-        <p:spPr>
-          <a:xfrm>
-            <a:off x="2476500" y="3048000"/>
-            <a:ext cx="914400" cy="685800"/>
-          </a:xfrm>
-          <a:prstGeom prst="rect">
-            <a:avLst/>
-          </a:prstGeom>
-          <a:noFill/>
-          <a:ln/>
-        </p:spPr>
-        <p:txBody>
-          <a:bodyPr wrap="square" lIns="0" tIns="0" rIns="0" bIns="0" rtlCol="0" anchor="ctr"/>
-          <a:lstStyle/>
-          <a:p>
-            <a:pPr algn="ctr" indent="0" marL="0">
-              <a:buNone/>
-            </a:pPr>
-            <a:r>
-              <a:rPr lang="en-US" sz="3900" b="1" dirty="0">
-                <a:solidFill>
-                  <a:srgbClr val="14459A"/>
-                </a:solidFill>
-                <a:latin typeface="Poppins" pitchFamily="34" charset="0"/>
-                <a:ea typeface="Poppins" pitchFamily="34" charset="-122"/>
-                <a:cs typeface="Poppins" pitchFamily="34" charset="-120"/>
-              </a:rPr>
-              <a:t>b</a:t>
             </a:r>
             <a:endParaRPr lang="en-US" sz="3900" dirty="0"/>
           </a:p>
@@ -2197,14 +3084,14 @@
       </p:grpSpPr>
       <p:sp>
         <p:nvSpPr>
-          <p:cNvPr id="3" name="Raute"/>
+          <p:cNvPr id="3" name="Form 05 Parallelogramm (Grundseite b)"/>
           <p:cNvSpPr/>
           <p:nvPr/>
         </p:nvSpPr>
         <p:spPr>
           <a:xfrm>
-            <a:off x="2667000" y="1524000"/>
-            <a:ext cx="6858000" cy="3810000"/>
+            <a:off x="3429000" y="1905000"/>
+            <a:ext cx="6096000" cy="3581400"/>
           </a:xfrm>
           <a:custGeom>
             <a:avLst/>
@@ -2213,18 +3100,18 @@
             <a:cxnLst/>
             <a:rect l="l" t="t" r="r" b="b"/>
             <a:pathLst>
-              <a:path w="6858000" h="3810000">
+              <a:path w="6096000" h="3581400">
                 <a:moveTo>
-                  <a:pt x="0" y="1905000"/>
+                  <a:pt x="0" y="3581400"/>
                 </a:moveTo>
                 <a:lnTo>
-                  <a:pt x="3429000" y="0"/>
+                  <a:pt x="3810000" y="3581400"/>
                 </a:lnTo>
                 <a:lnTo>
-                  <a:pt x="6858000" y="1905000"/>
+                  <a:pt x="6096000" y="0"/>
                 </a:lnTo>
                 <a:lnTo>
-                  <a:pt x="3429000" y="3810000"/>
+                  <a:pt x="2286000" y="0"/>
                 </a:lnTo>
                 <a:close/>
               </a:path>
@@ -2249,8 +3136,8 @@
         </p:nvSpPr>
         <p:spPr>
           <a:xfrm>
-            <a:off x="2667000" y="3429000"/>
-            <a:ext cx="6858000" cy="0"/>
+            <a:off x="5715000" y="1905000"/>
+            <a:ext cx="0" cy="3581400"/>
           </a:xfrm>
           <a:prstGeom prst="line">
             <a:avLst/>
@@ -2266,36 +3153,13 @@
       </p:sp>
       <p:sp>
         <p:nvSpPr>
-          <p:cNvPr id="5" name="Hilfslinie 2"/>
-          <p:cNvSpPr/>
-          <p:nvPr/>
-        </p:nvSpPr>
-        <p:spPr>
-          <a:xfrm>
-            <a:off x="6096000" y="1524000"/>
-            <a:ext cx="0" cy="3810000"/>
-          </a:xfrm>
-          <a:prstGeom prst="line">
-            <a:avLst/>
-          </a:prstGeom>
-          <a:noFill/>
-          <a:ln w="50800">
-            <a:solidFill>
-              <a:srgbClr val="14459A"/>
-            </a:solidFill>
-            <a:prstDash val="dash"/>
-          </a:ln>
-        </p:spPr>
-      </p:sp>
-      <p:sp>
-        <p:nvSpPr>
-          <p:cNvPr id="6" name="Beschriftung 1"/>
+          <p:cNvPr id="5" name="Beschriftung 1"/>
           <p:cNvSpPr txBox="1"/>
           <p:nvPr/>
         </p:nvSpPr>
         <p:spPr>
           <a:xfrm>
-            <a:off x="7620000" y="2819400"/>
+            <a:off x="4876800" y="5753100"/>
             <a:ext cx="914400" cy="685800"/>
           </a:xfrm>
           <a:prstGeom prst="rect">
@@ -2320,7 +3184,7 @@
                 <a:ea typeface="Poppins" pitchFamily="34" charset="-122"/>
                 <a:cs typeface="Poppins" pitchFamily="34" charset="-120"/>
               </a:rPr>
-              <a:t>e</a:t>
+              <a:t>b</a:t>
             </a:r>
             <a:endParaRPr lang="en-US" sz="3900" dirty="0"/>
           </a:p>
@@ -2328,13 +3192,13 @@
       </p:sp>
       <p:sp>
         <p:nvSpPr>
-          <p:cNvPr id="7" name="Beschriftung 2"/>
+          <p:cNvPr id="6" name="Beschriftung 2"/>
           <p:cNvSpPr txBox="1"/>
           <p:nvPr/>
         </p:nvSpPr>
         <p:spPr>
           <a:xfrm>
-            <a:off x="5943600" y="1943100"/>
+            <a:off x="5638800" y="3352800"/>
             <a:ext cx="914400" cy="685800"/>
           </a:xfrm>
           <a:prstGeom prst="rect">
@@ -2359,38 +3223,13 @@
                 <a:ea typeface="Poppins" pitchFamily="34" charset="-122"/>
                 <a:cs typeface="Poppins" pitchFamily="34" charset="-120"/>
               </a:rPr>
-              <a:t>f</a:t>
-            </a:r>
-            <a:endParaRPr lang="en-US" sz="3900" dirty="0"/>
-          </a:p>
-        </p:txBody>
-      </p:sp>
-      <p:sp>
-        <p:nvSpPr>
-          <p:cNvPr id="8" name="Beschriftung 3"/>
-          <p:cNvSpPr txBox="1"/>
-          <p:nvPr/>
-        </p:nvSpPr>
-        <p:spPr>
-          <a:xfrm>
-            <a:off x="7734300" y="1828800"/>
-            <a:ext cx="914400" cy="685800"/>
-          </a:xfrm>
-          <a:prstGeom prst="rect">
-            <a:avLst/>
-          </a:prstGeom>
-          <a:noFill/>
-          <a:ln/>
-        </p:spPr>
-        <p:txBody>
-          <a:bodyPr wrap="square" lIns="0" tIns="0" rIns="0" bIns="0" rtlCol="0" anchor="ctr"/>
-          <a:lstStyle/>
-          <a:p>
+              <a:t>h</a:t>
+            </a:r>
             <a:pPr algn="ctr" indent="0" marL="0">
               <a:buNone/>
             </a:pPr>
             <a:r>
-              <a:rPr lang="en-US" sz="3900" b="1" dirty="0">
+              <a:rPr lang="en-US" sz="3900" b="1" baseline="-40000" dirty="0">
                 <a:solidFill>
                   <a:srgbClr val="14459A"/>
                 </a:solidFill>
@@ -2398,7 +3237,7 @@
                 <a:ea typeface="Poppins" pitchFamily="34" charset="-122"/>
                 <a:cs typeface="Poppins" pitchFamily="34" charset="-120"/>
               </a:rPr>
-              <a:t>a</a:t>
+              <a:t>b</a:t>
             </a:r>
             <a:endParaRPr lang="en-US" sz="3900" dirty="0"/>
           </a:p>
@@ -2438,14 +3277,14 @@
       </p:grpSpPr>
       <p:sp>
         <p:nvSpPr>
-          <p:cNvPr id="3" name="Trapez"/>
+          <p:cNvPr id="3" name="Form 06 Raute (Seite a, Höhe h)"/>
           <p:cNvSpPr/>
           <p:nvPr/>
         </p:nvSpPr>
         <p:spPr>
           <a:xfrm>
-            <a:off x="2286000" y="1905000"/>
-            <a:ext cx="7620000" cy="3429000"/>
+            <a:off x="2667000" y="1905000"/>
+            <a:ext cx="6096000" cy="3048000"/>
           </a:xfrm>
           <a:custGeom>
             <a:avLst/>
@@ -2454,18 +3293,18 @@
             <a:cxnLst/>
             <a:rect l="l" t="t" r="r" b="b"/>
             <a:pathLst>
-              <a:path w="7620000" h="3429000">
+              <a:path w="6096000" h="3048000">
                 <a:moveTo>
-                  <a:pt x="0" y="3429000"/>
+                  <a:pt x="0" y="3048000"/>
                 </a:moveTo>
                 <a:lnTo>
-                  <a:pt x="7620000" y="3429000"/>
+                  <a:pt x="3810000" y="3048000"/>
                 </a:lnTo>
                 <a:lnTo>
-                  <a:pt x="5715000" y="0"/>
+                  <a:pt x="6096000" y="0"/>
                 </a:lnTo>
                 <a:lnTo>
-                  <a:pt x="1905000" y="0"/>
+                  <a:pt x="2286000" y="0"/>
                 </a:lnTo>
                 <a:close/>
               </a:path>
@@ -2490,8 +3329,8 @@
         </p:nvSpPr>
         <p:spPr>
           <a:xfrm>
-            <a:off x="4191000" y="1905000"/>
-            <a:ext cx="0" cy="3429000"/>
+            <a:off x="4953000" y="1905000"/>
+            <a:ext cx="0" cy="3048000"/>
           </a:xfrm>
           <a:prstGeom prst="line">
             <a:avLst/>
@@ -2513,7 +3352,7 @@
         </p:nvSpPr>
         <p:spPr>
           <a:xfrm>
-            <a:off x="5638800" y="5600700"/>
+            <a:off x="4114800" y="5219700"/>
             <a:ext cx="914400" cy="685800"/>
           </a:xfrm>
           <a:prstGeom prst="rect">
@@ -2552,46 +3391,7 @@
         </p:nvSpPr>
         <p:spPr>
           <a:xfrm>
-            <a:off x="5638800" y="1066800"/>
-            <a:ext cx="914400" cy="685800"/>
-          </a:xfrm>
-          <a:prstGeom prst="rect">
-            <a:avLst/>
-          </a:prstGeom>
-          <a:noFill/>
-          <a:ln/>
-        </p:spPr>
-        <p:txBody>
-          <a:bodyPr wrap="square" lIns="0" tIns="0" rIns="0" bIns="0" rtlCol="0" anchor="ctr"/>
-          <a:lstStyle/>
-          <a:p>
-            <a:pPr algn="ctr" indent="0" marL="0">
-              <a:buNone/>
-            </a:pPr>
-            <a:r>
-              <a:rPr lang="en-US" sz="3900" b="1" dirty="0">
-                <a:solidFill>
-                  <a:srgbClr val="14459A"/>
-                </a:solidFill>
-                <a:latin typeface="Poppins" pitchFamily="34" charset="0"/>
-                <a:ea typeface="Poppins" pitchFamily="34" charset="-122"/>
-                <a:cs typeface="Poppins" pitchFamily="34" charset="-120"/>
-              </a:rPr>
-              <a:t>c</a:t>
-            </a:r>
-            <a:endParaRPr lang="en-US" sz="3900" dirty="0"/>
-          </a:p>
-        </p:txBody>
-      </p:sp>
-      <p:sp>
-        <p:nvSpPr>
-          <p:cNvPr id="7" name="Beschriftung 3"/>
-          <p:cNvSpPr txBox="1"/>
-          <p:nvPr/>
-        </p:nvSpPr>
-        <p:spPr>
-          <a:xfrm>
-            <a:off x="3390900" y="3276600"/>
+            <a:off x="4838700" y="3086100"/>
             <a:ext cx="914400" cy="685800"/>
           </a:xfrm>
           <a:prstGeom prst="rect">
@@ -2656,14 +3456,14 @@
       </p:grpSpPr>
       <p:sp>
         <p:nvSpPr>
-          <p:cNvPr id="3" name="Deltoid"/>
+          <p:cNvPr id="3" name="Form 07 Raute (Diagonalen e, f)"/>
           <p:cNvSpPr/>
           <p:nvPr/>
         </p:nvSpPr>
         <p:spPr>
           <a:xfrm>
-            <a:off x="3429000" y="1143000"/>
-            <a:ext cx="5334000" cy="4572000"/>
+            <a:off x="2667000" y="1524000"/>
+            <a:ext cx="6858000" cy="3810000"/>
           </a:xfrm>
           <a:custGeom>
             <a:avLst/>
@@ -2672,18 +3472,18 @@
             <a:cxnLst/>
             <a:rect l="l" t="t" r="r" b="b"/>
             <a:pathLst>
-              <a:path w="5334000" h="4572000">
+              <a:path w="6858000" h="3810000">
                 <a:moveTo>
-                  <a:pt x="2667000" y="0"/>
+                  <a:pt x="0" y="1905000"/>
                 </a:moveTo>
                 <a:lnTo>
-                  <a:pt x="5334000" y="1524000"/>
+                  <a:pt x="3429000" y="0"/>
                 </a:lnTo>
                 <a:lnTo>
-                  <a:pt x="2667000" y="4572000"/>
+                  <a:pt x="6858000" y="1905000"/>
                 </a:lnTo>
                 <a:lnTo>
-                  <a:pt x="0" y="1524000"/>
+                  <a:pt x="3429000" y="3810000"/>
                 </a:lnTo>
                 <a:close/>
               </a:path>
@@ -2708,8 +3508,8 @@
         </p:nvSpPr>
         <p:spPr>
           <a:xfrm>
-            <a:off x="6096000" y="1143000"/>
-            <a:ext cx="0" cy="4572000"/>
+            <a:off x="2667000" y="3429000"/>
+            <a:ext cx="6858000" cy="0"/>
           </a:xfrm>
           <a:prstGeom prst="line">
             <a:avLst/>
@@ -2731,8 +3531,8 @@
         </p:nvSpPr>
         <p:spPr>
           <a:xfrm>
-            <a:off x="3429000" y="2667000"/>
-            <a:ext cx="5334000" cy="0"/>
+            <a:off x="6096000" y="1524000"/>
+            <a:ext cx="0" cy="3810000"/>
           </a:xfrm>
           <a:prstGeom prst="line">
             <a:avLst/>
@@ -2754,7 +3554,7 @@
         </p:nvSpPr>
         <p:spPr>
           <a:xfrm>
-            <a:off x="5943600" y="4076700"/>
+            <a:off x="7620000" y="2819400"/>
             <a:ext cx="914400" cy="685800"/>
           </a:xfrm>
           <a:prstGeom prst="rect">
@@ -2793,7 +3593,7 @@
         </p:nvSpPr>
         <p:spPr>
           <a:xfrm>
-            <a:off x="7162800" y="1981200"/>
+            <a:off x="5943600" y="1943100"/>
             <a:ext cx="914400" cy="685800"/>
           </a:xfrm>
           <a:prstGeom prst="rect">
@@ -2858,14 +3658,14 @@
       </p:grpSpPr>
       <p:sp>
         <p:nvSpPr>
-          <p:cNvPr id="3" name="Allgemeines Dreieck"/>
+          <p:cNvPr id="3" name="Form 08 Trapez"/>
           <p:cNvSpPr/>
           <p:nvPr/>
         </p:nvSpPr>
         <p:spPr>
           <a:xfrm>
-            <a:off x="2667000" y="1752600"/>
-            <a:ext cx="6858000" cy="3581400"/>
+            <a:off x="2286000" y="1905000"/>
+            <a:ext cx="7620000" cy="3429000"/>
           </a:xfrm>
           <a:custGeom>
             <a:avLst/>
@@ -2874,15 +3674,18 @@
             <a:cxnLst/>
             <a:rect l="l" t="t" r="r" b="b"/>
             <a:pathLst>
-              <a:path w="6858000" h="3581400">
+              <a:path w="7620000" h="3429000">
                 <a:moveTo>
-                  <a:pt x="0" y="3581400"/>
+                  <a:pt x="0" y="3429000"/>
                 </a:moveTo>
                 <a:lnTo>
-                  <a:pt x="6858000" y="3581400"/>
+                  <a:pt x="7620000" y="3429000"/>
                 </a:lnTo>
                 <a:lnTo>
-                  <a:pt x="3810000" y="0"/>
+                  <a:pt x="5715000" y="0"/>
+                </a:lnTo>
+                <a:lnTo>
+                  <a:pt x="1905000" y="0"/>
                 </a:lnTo>
                 <a:close/>
               </a:path>
@@ -2907,8 +3710,8 @@
         </p:nvSpPr>
         <p:spPr>
           <a:xfrm>
-            <a:off x="6477000" y="1752600"/>
-            <a:ext cx="0" cy="3581400"/>
+            <a:off x="4191000" y="1905000"/>
+            <a:ext cx="0" cy="3429000"/>
           </a:xfrm>
           <a:prstGeom prst="line">
             <a:avLst/>
@@ -2931,6 +3734,45 @@
         <p:spPr>
           <a:xfrm>
             <a:off x="5638800" y="5600700"/>
+            <a:ext cx="914400" cy="685800"/>
+          </a:xfrm>
+          <a:prstGeom prst="rect">
+            <a:avLst/>
+          </a:prstGeom>
+          <a:noFill/>
+          <a:ln/>
+        </p:spPr>
+        <p:txBody>
+          <a:bodyPr wrap="square" lIns="0" tIns="0" rIns="0" bIns="0" rtlCol="0" anchor="ctr"/>
+          <a:lstStyle/>
+          <a:p>
+            <a:pPr algn="ctr" indent="0" marL="0">
+              <a:buNone/>
+            </a:pPr>
+            <a:r>
+              <a:rPr lang="en-US" sz="3900" b="1" dirty="0">
+                <a:solidFill>
+                  <a:srgbClr val="14459A"/>
+                </a:solidFill>
+                <a:latin typeface="Poppins" pitchFamily="34" charset="0"/>
+                <a:ea typeface="Poppins" pitchFamily="34" charset="-122"/>
+                <a:cs typeface="Poppins" pitchFamily="34" charset="-120"/>
+              </a:rPr>
+              <a:t>a</a:t>
+            </a:r>
+            <a:endParaRPr lang="en-US" sz="3900" dirty="0"/>
+          </a:p>
+        </p:txBody>
+      </p:sp>
+      <p:sp>
+        <p:nvSpPr>
+          <p:cNvPr id="6" name="Beschriftung 2"/>
+          <p:cNvSpPr txBox="1"/>
+          <p:nvPr/>
+        </p:nvSpPr>
+        <p:spPr>
+          <a:xfrm>
+            <a:off x="5638800" y="1066800"/>
             <a:ext cx="914400" cy="685800"/>
           </a:xfrm>
           <a:prstGeom prst="rect">
@@ -2963,13 +3805,13 @@
       </p:sp>
       <p:sp>
         <p:nvSpPr>
-          <p:cNvPr id="6" name="Beschriftung 2"/>
+          <p:cNvPr id="7" name="Beschriftung 3"/>
           <p:cNvSpPr txBox="1"/>
           <p:nvPr/>
         </p:nvSpPr>
         <p:spPr>
           <a:xfrm>
-            <a:off x="5676900" y="3314700"/>
+            <a:off x="3390900" y="3276600"/>
             <a:ext cx="914400" cy="685800"/>
           </a:xfrm>
           <a:prstGeom prst="rect">
@@ -2996,11 +3838,160 @@
               </a:rPr>
               <a:t>h</a:t>
             </a:r>
+            <a:endParaRPr lang="en-US" sz="3900" dirty="0"/>
+          </a:p>
+        </p:txBody>
+      </p:sp>
+    </p:spTree>
+  </p:cSld>
+  <p:clrMapOvr>
+    <a:masterClrMapping/>
+  </p:clrMapOvr>
+</p:sld>
+</file>
+
+<file path=ppt/slides/slide9.xml><?xml version="1.0" encoding="utf-8"?>
+<p:sld xmlns:a="http://schemas.openxmlformats.org/drawingml/2006/main" xmlns:r="http://schemas.openxmlformats.org/officeDocument/2006/relationships" xmlns:p="http://schemas.openxmlformats.org/presentationml/2006/main">
+  <p:cSld name="Slide 9">
+    <p:bg>
+      <p:bgPr>
+        <a:solidFill>
+          <a:srgbClr val="DCEBFA"/>
+        </a:solidFill>
+      </p:bgPr>
+    </p:bg>
+    <p:spTree>
+      <p:nvGrpSpPr>
+        <p:cNvPr id="1" name=""/>
+        <p:cNvGrpSpPr/>
+        <p:nvPr/>
+      </p:nvGrpSpPr>
+      <p:grpSpPr>
+        <a:xfrm>
+          <a:off x="0" y="0"/>
+          <a:ext cx="0" cy="0"/>
+          <a:chOff x="0" y="0"/>
+          <a:chExt cx="0" cy="0"/>
+        </a:xfrm>
+      </p:grpSpPr>
+      <p:sp>
+        <p:nvSpPr>
+          <p:cNvPr id="3" name="Form 09 Deltoid"/>
+          <p:cNvSpPr/>
+          <p:nvPr/>
+        </p:nvSpPr>
+        <p:spPr>
+          <a:xfrm>
+            <a:off x="3429000" y="1143000"/>
+            <a:ext cx="5334000" cy="4572000"/>
+          </a:xfrm>
+          <a:custGeom>
+            <a:avLst/>
+            <a:gdLst/>
+            <a:ahLst/>
+            <a:cxnLst/>
+            <a:rect l="l" t="t" r="r" b="b"/>
+            <a:pathLst>
+              <a:path w="5334000" h="4572000">
+                <a:moveTo>
+                  <a:pt x="2667000" y="0"/>
+                </a:moveTo>
+                <a:lnTo>
+                  <a:pt x="5334000" y="1524000"/>
+                </a:lnTo>
+                <a:lnTo>
+                  <a:pt x="2667000" y="4572000"/>
+                </a:lnTo>
+                <a:lnTo>
+                  <a:pt x="0" y="1524000"/>
+                </a:lnTo>
+                <a:close/>
+              </a:path>
+            </a:pathLst>
+          </a:custGeom>
+          <a:solidFill>
+            <a:srgbClr val="8DBBF2"/>
+          </a:solidFill>
+          <a:ln w="76200">
+            <a:solidFill>
+              <a:srgbClr val="0F2A52"/>
+            </a:solidFill>
+            <a:prstDash val="solid"/>
+          </a:ln>
+        </p:spPr>
+      </p:sp>
+      <p:sp>
+        <p:nvSpPr>
+          <p:cNvPr id="4" name="Hilfslinie 1"/>
+          <p:cNvSpPr/>
+          <p:nvPr/>
+        </p:nvSpPr>
+        <p:spPr>
+          <a:xfrm>
+            <a:off x="6096000" y="1143000"/>
+            <a:ext cx="0" cy="4572000"/>
+          </a:xfrm>
+          <a:prstGeom prst="line">
+            <a:avLst/>
+          </a:prstGeom>
+          <a:noFill/>
+          <a:ln w="50800">
+            <a:solidFill>
+              <a:srgbClr val="14459A"/>
+            </a:solidFill>
+            <a:prstDash val="dash"/>
+          </a:ln>
+        </p:spPr>
+      </p:sp>
+      <p:sp>
+        <p:nvSpPr>
+          <p:cNvPr id="5" name="Hilfslinie 2"/>
+          <p:cNvSpPr/>
+          <p:nvPr/>
+        </p:nvSpPr>
+        <p:spPr>
+          <a:xfrm>
+            <a:off x="3429000" y="2667000"/>
+            <a:ext cx="5334000" cy="0"/>
+          </a:xfrm>
+          <a:prstGeom prst="line">
+            <a:avLst/>
+          </a:prstGeom>
+          <a:noFill/>
+          <a:ln w="50800">
+            <a:solidFill>
+              <a:srgbClr val="14459A"/>
+            </a:solidFill>
+            <a:prstDash val="dash"/>
+          </a:ln>
+        </p:spPr>
+      </p:sp>
+      <p:sp>
+        <p:nvSpPr>
+          <p:cNvPr id="6" name="Beschriftung 1"/>
+          <p:cNvSpPr txBox="1"/>
+          <p:nvPr/>
+        </p:nvSpPr>
+        <p:spPr>
+          <a:xfrm>
+            <a:off x="5943600" y="4076700"/>
+            <a:ext cx="914400" cy="685800"/>
+          </a:xfrm>
+          <a:prstGeom prst="rect">
+            <a:avLst/>
+          </a:prstGeom>
+          <a:noFill/>
+          <a:ln/>
+        </p:spPr>
+        <p:txBody>
+          <a:bodyPr wrap="square" lIns="0" tIns="0" rIns="0" bIns="0" rtlCol="0" anchor="ctr"/>
+          <a:lstStyle/>
+          <a:p>
             <a:pPr algn="ctr" indent="0" marL="0">
               <a:buNone/>
             </a:pPr>
             <a:r>
-              <a:rPr lang="en-US" sz="3900" b="1" baseline="-40000" dirty="0">
+              <a:rPr lang="en-US" sz="3900" b="1" dirty="0">
                 <a:solidFill>
                   <a:srgbClr val="14459A"/>
                 </a:solidFill>
@@ -3008,7 +3999,46 @@
                 <a:ea typeface="Poppins" pitchFamily="34" charset="-122"/>
                 <a:cs typeface="Poppins" pitchFamily="34" charset="-120"/>
               </a:rPr>
-              <a:t>c</a:t>
+              <a:t>e</a:t>
+            </a:r>
+            <a:endParaRPr lang="en-US" sz="3900" dirty="0"/>
+          </a:p>
+        </p:txBody>
+      </p:sp>
+      <p:sp>
+        <p:nvSpPr>
+          <p:cNvPr id="7" name="Beschriftung 2"/>
+          <p:cNvSpPr txBox="1"/>
+          <p:nvPr/>
+        </p:nvSpPr>
+        <p:spPr>
+          <a:xfrm>
+            <a:off x="7162800" y="1981200"/>
+            <a:ext cx="914400" cy="685800"/>
+          </a:xfrm>
+          <a:prstGeom prst="rect">
+            <a:avLst/>
+          </a:prstGeom>
+          <a:noFill/>
+          <a:ln/>
+        </p:spPr>
+        <p:txBody>
+          <a:bodyPr wrap="square" lIns="0" tIns="0" rIns="0" bIns="0" rtlCol="0" anchor="ctr"/>
+          <a:lstStyle/>
+          <a:p>
+            <a:pPr algn="ctr" indent="0" marL="0">
+              <a:buNone/>
+            </a:pPr>
+            <a:r>
+              <a:rPr lang="en-US" sz="3900" b="1" dirty="0">
+                <a:solidFill>
+                  <a:srgbClr val="14459A"/>
+                </a:solidFill>
+                <a:latin typeface="Poppins" pitchFamily="34" charset="0"/>
+                <a:ea typeface="Poppins" pitchFamily="34" charset="-122"/>
+                <a:cs typeface="Poppins" pitchFamily="34" charset="-120"/>
+              </a:rPr>
+              <a:t>f</a:t>
             </a:r>
             <a:endParaRPr lang="en-US" sz="3900" dirty="0"/>
           </a:p>
